--- a/curso/pptx/S76.pptx
+++ b/curso/pptx/S76.pptx
@@ -6792,7 +6792,7 @@
                 </a:solidFill>
                 <a:latin typeface="Nunito Sans"/>
               </a:rPr>
-              <a:t>Es </a:t>
+              <a:t>它是</a:t>
             </a:r>
             <a:r>
               <a:rPr sz="2800" b="1">
@@ -6801,7 +6801,7 @@
                 </a:solidFill>
                 <a:latin typeface="Nunito Sans"/>
               </a:rPr>
-              <a:t>normal</a:t>
+              <a:t>正常的</a:t>
             </a:r>
             <a:r>
               <a:rPr sz="2800" b="0">
@@ -6810,7 +6810,7 @@
                 </a:solidFill>
                 <a:latin typeface="Nunito Sans"/>
               </a:rPr>
-              <a:t>: aparece en cualquier grupo</a:t>
+              <a:t>：在任何集体里都会出现</a:t>
             </a:r>
           </a:p>
           <a:p>
@@ -6835,7 +6835,7 @@
                 </a:solidFill>
                 <a:latin typeface="Nunito Sans"/>
               </a:rPr>
-              <a:t>No es lo mismo que una </a:t>
+              <a:t>它和</a:t>
             </a:r>
             <a:r>
               <a:rPr sz="2800" b="1">
@@ -6844,7 +6844,16 @@
                 </a:solidFill>
                 <a:latin typeface="Nunito Sans"/>
               </a:rPr>
-              <a:t>pelea</a:t>
+              <a:t>打架</a:t>
+            </a:r>
+            <a:r>
+              <a:rPr sz="2800" b="0">
+                <a:solidFill>
+                  <a:srgbClr val="1F2A44"/>
+                </a:solidFill>
+                <a:latin typeface="Nunito Sans"/>
+              </a:rPr>
+              <a:t>不是一回事</a:t>
             </a:r>
           </a:p>
           <a:p>
@@ -6869,7 +6878,7 @@
                 </a:solidFill>
                 <a:latin typeface="Nunito Sans"/>
               </a:rPr>
-              <a:t>La pelea es una mala forma de </a:t>
+              <a:t>打架是</a:t>
             </a:r>
             <a:r>
               <a:rPr sz="2800" b="1">
@@ -6878,7 +6887,16 @@
                 </a:solidFill>
                 <a:latin typeface="Nunito Sans"/>
               </a:rPr>
-              <a:t>afrontarlo</a:t>
+              <a:t>面对</a:t>
+            </a:r>
+            <a:r>
+              <a:rPr sz="2800" b="0">
+                <a:solidFill>
+                  <a:srgbClr val="1F2A44"/>
+                </a:solidFill>
+                <a:latin typeface="Nunito Sans"/>
+              </a:rPr>
+              <a:t>冲突的一种糟糕的方式</a:t>
             </a:r>
           </a:p>
         </p:txBody>
@@ -7540,7 +7558,7 @@
                 </a:solidFill>
                 <a:latin typeface="Nunito Sans"/>
               </a:rPr>
-              <a:t>Evitar:</a:t>
+              <a:t>回避：</a:t>
             </a:r>
             <a:r>
               <a:rPr sz="2800" b="0">
@@ -7549,7 +7567,7 @@
                 </a:solidFill>
                 <a:latin typeface="Nunito Sans"/>
               </a:rPr>
-              <a:t> hago como si no pasara nada.</a:t>
+              <a:t>我装作什么也没发生。</a:t>
             </a:r>
           </a:p>
           <a:p>
@@ -7574,7 +7592,7 @@
                 </a:solidFill>
                 <a:latin typeface="Nunito Sans"/>
               </a:rPr>
-              <a:t>Ceder:</a:t>
+              <a:t>让步：</a:t>
             </a:r>
             <a:r>
               <a:rPr sz="2800" b="0">
@@ -7583,7 +7601,7 @@
                 </a:solidFill>
                 <a:latin typeface="Nunito Sans"/>
               </a:rPr>
-              <a:t> dejo que el otro consiga lo suyo.</a:t>
+              <a:t>我让对方得到他想要的。</a:t>
             </a:r>
           </a:p>
           <a:p>
@@ -7608,7 +7626,7 @@
                 </a:solidFill>
                 <a:latin typeface="Nunito Sans"/>
               </a:rPr>
-              <a:t>Competir:</a:t>
+              <a:t>竞争：</a:t>
             </a:r>
             <a:r>
               <a:rPr sz="2800" b="0">
@@ -7617,7 +7635,7 @@
                 </a:solidFill>
                 <a:latin typeface="Nunito Sans"/>
               </a:rPr>
-              <a:t> intento ganar yo, aunque el otro pierda.</a:t>
+              <a:t>我想赢，哪怕对方输。</a:t>
             </a:r>
           </a:p>
           <a:p>
@@ -7642,7 +7660,7 @@
                 </a:solidFill>
                 <a:latin typeface="Nunito Sans"/>
               </a:rPr>
-              <a:t>Pactar:</a:t>
+              <a:t>妥协：</a:t>
             </a:r>
             <a:r>
               <a:rPr sz="2800" b="0">
@@ -7651,7 +7669,7 @@
                 </a:solidFill>
                 <a:latin typeface="Nunito Sans"/>
               </a:rPr>
-              <a:t> cada uno renuncia a una parte.</a:t>
+              <a:t>每个人放弃一部分。</a:t>
             </a:r>
           </a:p>
           <a:p>
@@ -7676,7 +7694,7 @@
                 </a:solidFill>
                 <a:latin typeface="Nunito Sans"/>
               </a:rPr>
-              <a:t>Colaborar:</a:t>
+              <a:t>合作：</a:t>
             </a:r>
             <a:r>
               <a:rPr sz="2800" b="0">
@@ -7685,7 +7703,7 @@
                 </a:solidFill>
                 <a:latin typeface="Nunito Sans"/>
               </a:rPr>
-              <a:t> buscamos juntos una salida buena para los dos.</a:t>
+              <a:t>我们一起找一条对两个人都好的出路。</a:t>
             </a:r>
           </a:p>
         </p:txBody>
@@ -7913,31 +7931,22 @@
               <a:t>• </a:t>
             </a:r>
             <a:r>
+              <a:rPr sz="2800" b="1">
+                <a:solidFill>
+                  <a:srgbClr val="1F2A44"/>
+                </a:solidFill>
+                <a:latin typeface="Nunito Sans"/>
+              </a:rPr>
+              <a:t>立场</a:t>
+            </a:r>
+            <a:r>
               <a:rPr sz="2800" b="0">
                 <a:solidFill>
                   <a:srgbClr val="1F2A44"/>
                 </a:solidFill>
                 <a:latin typeface="Nunito Sans"/>
               </a:rPr>
-              <a:t>Las </a:t>
-            </a:r>
-            <a:r>
-              <a:rPr sz="2800" b="1">
-                <a:solidFill>
-                  <a:srgbClr val="1F2A44"/>
-                </a:solidFill>
-                <a:latin typeface="Nunito Sans"/>
-              </a:rPr>
-              <a:t>posturas</a:t>
-            </a:r>
-            <a:r>
-              <a:rPr sz="2800" b="0">
-                <a:solidFill>
-                  <a:srgbClr val="1F2A44"/>
-                </a:solidFill>
-                <a:latin typeface="Nunito Sans"/>
-              </a:rPr>
-              <a:t> chocan más que los intereses</a:t>
+              <a:t>比利益更容易碰撞</a:t>
             </a:r>
           </a:p>
           <a:p>
@@ -7962,7 +7971,7 @@
                 </a:solidFill>
                 <a:latin typeface="Nunito Sans"/>
               </a:rPr>
-              <a:t>Pregunta clave: «¿Para qué lo quieres?»</a:t>
+              <a:t>关键问题：“你要它做什么？”</a:t>
             </a:r>
           </a:p>
           <a:p>
@@ -7987,7 +7996,7 @@
                 </a:solidFill>
                 <a:latin typeface="Nunito Sans"/>
               </a:rPr>
-              <a:t>Idea de Roger Fisher y William Ury (Harvard, 1981)</a:t>
+              <a:t>罗杰·费舍尔和威廉·尤里的想法（哈佛，1981）</a:t>
             </a:r>
           </a:p>
         </p:txBody>

--- a/curso/pptx/S76.pptx
+++ b/curso/pptx/S76.pptx
@@ -4232,7 +4232,7 @@
                 </a:solidFill>
                 <a:latin typeface="Nunito Sans"/>
               </a:rPr>
-              <a:t>蕾尔的立场：“我现在就要电脑。”艾托尔的立场：“我要用。”他们的妈妈问他们每个人：“你要它做什么？”</a:t>
+              <a:t>一个女孩的立场：“我现在就要电脑。”弟弟的立场：“我要用。”他们的妈妈问他们每个人：“你要它做什么？”</a:t>
             </a:r>
           </a:p>
         </p:txBody>
@@ -4280,7 +4280,7 @@
                 </a:solidFill>
                 <a:latin typeface="Nunito Sans"/>
               </a:rPr>
-              <a:t>蕾尔的利益：在晚上8点之前交一份作业。</a:t>
+              <a:t>这个女孩的利益：在晚上8点之前交一份作业。</a:t>
             </a:r>
           </a:p>
           <a:p>
@@ -4305,7 +4305,7 @@
                 </a:solidFill>
                 <a:latin typeface="Nunito Sans"/>
               </a:rPr>
-              <a:t>艾托尔的利益：和他的朋友们在线玩游戏，他们约在晚上9点。</a:t>
+              <a:t>弟弟的利益：和他的朋友们在线玩游戏，他们约在晚上9点。</a:t>
             </a:r>
           </a:p>
           <a:p>
@@ -4355,7 +4355,7 @@
                 </a:solidFill>
                 <a:latin typeface="Nunito Sans"/>
               </a:rPr>
-              <a:t>结论：蕾尔用到晚上8点，艾托尔再用。关注利益，就能合作。</a:t>
+              <a:t>结论：这个女孩用到晚上8点，弟弟再用。关注利益，就能合作。</a:t>
             </a:r>
           </a:p>
         </p:txBody>
@@ -4541,7 +4541,7 @@
                 </a:solidFill>
                 <a:latin typeface="Nunito Sans"/>
               </a:rPr>
-              <a:t>去乌尔代拜的郊游。陈想坐靠窗的位置。玛亚伦无所谓，但陈如果不看窗外就会晕车。</a:t>
+              <a:t>去乌尔代拜的郊游。一个男孩想坐靠窗的位置。一个女孩无所谓，但这个男孩如果不看窗外就会晕车。</a:t>
             </a:r>
           </a:p>
         </p:txBody>
@@ -4589,7 +4589,7 @@
                 </a:solidFill>
                 <a:latin typeface="Nunito Sans"/>
               </a:rPr>
-              <a:t>对玛亚伦来说，哪种态度合理？让步。</a:t>
+              <a:t>对这个女孩来说，哪种态度合理？让步。</a:t>
             </a:r>
           </a:p>
           <a:p>
@@ -4614,7 +4614,7 @@
                 </a:solidFill>
                 <a:latin typeface="Nunito Sans"/>
               </a:rPr>
-              <a:t>为什么要让步？她几乎不在乎，而陈很在乎。</a:t>
+              <a:t>为什么要让步？她几乎不在乎，而这个男孩很在乎。</a:t>
             </a:r>
           </a:p>
           <a:p>
@@ -4850,7 +4850,7 @@
                 </a:solidFill>
                 <a:latin typeface="Nunito Sans"/>
               </a:rPr>
-              <a:t>奥马尔吹嘘：“在我的朋友圈里从来没有冲突。”但奈亚拉总是让步，凯文遇到不喜欢的事就不说话。</a:t>
+              <a:t>一个男孩吹嘘：“在我的朋友圈里从来没有冲突。”但一个女孩总是让步，一个同学遇到不喜欢的事就不说话。</a:t>
             </a:r>
           </a:p>
         </p:txBody>
@@ -4948,7 +4948,7 @@
                 </a:solidFill>
                 <a:latin typeface="Nunito Sans"/>
               </a:rPr>
-              <a:t>但奈亚拉总是让步，凯文总是回避。冲突是存在的，只是被藏起来了。</a:t>
+              <a:t>但这个女孩总是让步，这个同学总是回避。冲突是存在的，只是被藏起来了。</a:t>
             </a:r>
           </a:p>
           <a:p>
@@ -6415,7 +6415,7 @@
                 </a:solidFill>
                 <a:latin typeface="Nunito Sans"/>
               </a:rPr>
-              <a:t>蕾尔和她的弟弟艾托尔想在同一时间用家里的电脑。每个人都在喊：“是我先要的！”没有人让步。</a:t>
+              <a:t>一个女孩和她的弟弟想在同一时间用家里的电脑。每个人都在喊：“是我先要的！”没有人让步。</a:t>
             </a:r>
           </a:p>
         </p:txBody>
